--- a/apps/resources/bundled_files/2-klass-100-ichinde-sabak-v2.pptx
+++ b/apps/resources/bundled_files/2-klass-100-ichinde-sabak-v2.pptx
@@ -5196,7 +5196,7 @@
                 </a:solidFill>
                 <a:latin typeface="PT Sans"/>
               </a:rPr>
-              <a:t>2-класс · Математика</a:t>
+              <a:t/>
             </a:r>
           </a:p>
         </p:txBody>
@@ -5688,7 +5688,7 @@
                 </a:solidFill>
                 <a:latin typeface="PT Sans"/>
               </a:rPr>
-              <a:t>2-класс ›</a:t>
+              <a:t/>
             </a:r>
           </a:p>
           <a:p>
@@ -6637,7 +6637,7 @@
                 </a:solidFill>
                 <a:latin typeface="PT Sans"/>
               </a:rPr>
-              <a:t>2-класс ›</a:t>
+              <a:t/>
             </a:r>
           </a:p>
           <a:p>
@@ -11451,7 +11451,7 @@
                 </a:solidFill>
                 <a:latin typeface="PT Sans"/>
               </a:rPr>
-              <a:t>2-класс ›</a:t>
+              <a:t/>
             </a:r>
           </a:p>
           <a:p>
@@ -13836,7 +13836,7 @@
                 </a:solidFill>
                 <a:latin typeface="PT Sans"/>
               </a:rPr>
-              <a:t>2-класс ›</a:t>
+              <a:t/>
             </a:r>
           </a:p>
           <a:p>
@@ -15166,7 +15166,7 @@
                 </a:solidFill>
                 <a:latin typeface="PT Sans"/>
               </a:rPr>
-              <a:t>2-класс ›</a:t>
+              <a:t/>
             </a:r>
           </a:p>
           <a:p>
@@ -15878,7 +15878,7 @@
                 </a:solidFill>
                 <a:latin typeface="PT Sans"/>
               </a:rPr>
-              <a:t>2-класс ›</a:t>
+              <a:t/>
             </a:r>
           </a:p>
           <a:p>
@@ -16668,7 +16668,7 @@
                 </a:solidFill>
                 <a:latin typeface="PT Sans"/>
               </a:rPr>
-              <a:t>2-класс ›</a:t>
+              <a:t/>
             </a:r>
           </a:p>
           <a:p>
@@ -18334,7 +18334,7 @@
                 </a:solidFill>
                 <a:latin typeface="PT Sans"/>
               </a:rPr>
-              <a:t>2-класс ›</a:t>
+              <a:t/>
             </a:r>
           </a:p>
           <a:p>
@@ -19418,7 +19418,7 @@
                 </a:solidFill>
                 <a:latin typeface="PT Sans"/>
               </a:rPr>
-              <a:t>2-класс ›</a:t>
+              <a:t/>
             </a:r>
           </a:p>
           <a:p>
@@ -20948,7 +20948,7 @@
                 </a:solidFill>
                 <a:latin typeface="PT Sans"/>
               </a:rPr>
-              <a:t>2-класс ›</a:t>
+              <a:t/>
             </a:r>
           </a:p>
           <a:p>
@@ -22819,7 +22819,7 @@
                 </a:solidFill>
                 <a:latin typeface="PT Sans"/>
               </a:rPr>
-              <a:t>2-класс ›</a:t>
+              <a:t/>
             </a:r>
           </a:p>
           <a:p>
@@ -24096,7 +24096,7 @@
                 </a:solidFill>
                 <a:latin typeface="PT Sans"/>
               </a:rPr>
-              <a:t>2-класс ›</a:t>
+              <a:t/>
             </a:r>
           </a:p>
           <a:p>
@@ -25524,7 +25524,7 @@
                 </a:solidFill>
                 <a:latin typeface="PT Sans"/>
               </a:rPr>
-              <a:t>2-класс ›</a:t>
+              <a:t/>
             </a:r>
           </a:p>
           <a:p>
@@ -26980,7 +26980,7 @@
                 </a:solidFill>
                 <a:latin typeface="PT Sans"/>
               </a:rPr>
-              <a:t>2-класс ›</a:t>
+              <a:t/>
             </a:r>
           </a:p>
           <a:p>
@@ -28027,7 +28027,7 @@
                 </a:solidFill>
                 <a:latin typeface="PT Sans"/>
               </a:rPr>
-              <a:t>2-класс ›</a:t>
+              <a:t/>
             </a:r>
           </a:p>
           <a:p>
@@ -28827,7 +28827,7 @@
                 </a:solidFill>
                 <a:latin typeface="PT Sans"/>
               </a:rPr>
-              <a:t>2-класс ›</a:t>
+              <a:t/>
             </a:r>
           </a:p>
           <a:p>
@@ -29668,7 +29668,7 @@
                 </a:solidFill>
                 <a:latin typeface="PT Sans"/>
               </a:rPr>
-              <a:t>2-класс ›</a:t>
+              <a:t/>
             </a:r>
           </a:p>
           <a:p>
@@ -30617,7 +30617,7 @@
                 </a:solidFill>
                 <a:latin typeface="PT Sans"/>
               </a:rPr>
-              <a:t>2-класс ›</a:t>
+              <a:t/>
             </a:r>
           </a:p>
           <a:p>
@@ -32071,7 +32071,7 @@
                 </a:solidFill>
                 <a:latin typeface="PT Sans"/>
               </a:rPr>
-              <a:t>2-класс ›</a:t>
+              <a:t/>
             </a:r>
           </a:p>
           <a:p>
@@ -32817,7 +32817,7 @@
                 </a:solidFill>
                 <a:latin typeface="PT Sans"/>
               </a:rPr>
-              <a:t>2-класс ›</a:t>
+              <a:t/>
             </a:r>
           </a:p>
           <a:p>
@@ -33625,7 +33625,7 @@
                 </a:solidFill>
                 <a:latin typeface="PT Sans"/>
               </a:rPr>
-              <a:t>2-класс ›</a:t>
+              <a:t/>
             </a:r>
           </a:p>
           <a:p>
@@ -34816,7 +34816,7 @@
                 </a:solidFill>
                 <a:latin typeface="PT Sans"/>
               </a:rPr>
-              <a:t>2-класс ›</a:t>
+              <a:t/>
             </a:r>
           </a:p>
           <a:p>
@@ -36011,7 +36011,7 @@
                 </a:solidFill>
                 <a:latin typeface="PT Sans"/>
               </a:rPr>
-              <a:t>2-класс ›</a:t>
+              <a:t/>
             </a:r>
           </a:p>
           <a:p>
@@ -36192,7 +36192,7 @@
                 </a:solidFill>
                 <a:latin typeface="PT Sans"/>
               </a:rPr>
-              <a:t>1-класс</a:t>
+              <a:t/>
             </a:r>
           </a:p>
         </p:txBody>
@@ -36372,7 +36372,7 @@
                 </a:solidFill>
                 <a:latin typeface="PT Sans"/>
               </a:rPr>
-              <a:t>2-класс</a:t>
+              <a:t/>
             </a:r>
           </a:p>
         </p:txBody>
@@ -36608,7 +36608,7 @@
                 </a:solidFill>
                 <a:latin typeface="PT Sans"/>
               </a:rPr>
-              <a:t>3-класс</a:t>
+              <a:t/>
             </a:r>
           </a:p>
         </p:txBody>
@@ -36789,7 +36789,7 @@
                 </a:solidFill>
                 <a:latin typeface="PT Sans"/>
               </a:rPr>
-              <a:t>4-класс</a:t>
+              <a:t/>
             </a:r>
           </a:p>
         </p:txBody>
@@ -37190,7 +37190,7 @@
                 </a:solidFill>
                 <a:latin typeface="PT Sans"/>
               </a:rPr>
-              <a:t>2-класс ›</a:t>
+              <a:t/>
             </a:r>
           </a:p>
           <a:p>
@@ -38338,7 +38338,7 @@
                 </a:solidFill>
                 <a:latin typeface="PT Sans"/>
               </a:rPr>
-              <a:t>2-класс ›</a:t>
+              <a:t/>
             </a:r>
           </a:p>
           <a:p>

--- a/apps/resources/bundled_files/2-klass-100-ichinde-sabak-v2.pptx
+++ b/apps/resources/bundled_files/2-klass-100-ichinde-sabak-v2.pptx
@@ -1582,7 +1582,7 @@
           <a:lstStyle/>
           <a:p>
             <a:r>
-              <a:t>Ой жүгүртүү маданияты (Wenxi Lee, 2.6).</a:t>
+              <a:t>Ой жүгүртүү маданияты (Wenxi Lee, 2,6).</a:t>
             </a:r>
           </a:p>
         </p:txBody>
